--- a/Topic_B/Exam_Practice/TB-L08_Writing_Workshop_Hobbies_Sport_and_Free_Time.pptx
+++ b/Topic_B/Exam_Practice/TB-L08_Writing_Workshop_Hobbies_Sport_and_Free_Time.pptx
@@ -784,7 +784,11 @@
           <a:lstStyle/>
           <a:p>
             <a:r>
-              <a:rPr lang="en-US" dirty="0"/>
+              <a:rPr lang="ar-SA" dirty="0">
+                <a:latin typeface="Amiri" pitchFamily="2" charset="-78"/>
+                <a:ea typeface="Amiri" pitchFamily="2" charset="-78"/>
+                <a:cs typeface="Amiri" pitchFamily="2" charset="-78"/>
+              </a:rPr>
               <a:t>Q3 (3 min to choose and read). Title (أ) suits Core and Develop; title (ب) suits Stretch.</a:t>
             </a:r>
             <a:endParaRPr lang="en-US" dirty="0"/>
@@ -1403,7 +1407,11 @@
           <a:lstStyle/>
           <a:p>
             <a:r>
-              <a:rPr lang="en-US" dirty="0"/>
+              <a:rPr lang="ar-SA" dirty="0">
+                <a:latin typeface="Amiri" pitchFamily="2" charset="-78"/>
+                <a:ea typeface="Amiri" pitchFamily="2" charset="-78"/>
+                <a:cs typeface="Amiri" pitchFamily="2" charset="-78"/>
+              </a:rPr>
               <a:t>WELCOME (1 min) — while students join.
 • Greet each student by name as they arrive: السَّلَامُ عَلَيْكُمْ. Take the register (Pastoral Tracker: attendance 0/1).
 • 2-MINUTE CHECK-IN (SEND training): a private chat to any student who seemed unsettled last lesson — “Are you okay today? 👍 / 👎”.
@@ -1936,7 +1944,11 @@
           <a:lstStyle/>
           <a:p>
             <a:r>
-              <a:rPr lang="en-US" dirty="0"/>
+              <a:rPr lang="ar-SA" dirty="0">
+                <a:latin typeface="Amiri" pitchFamily="2" charset="-78"/>
+                <a:ea typeface="Amiri" pitchFamily="2" charset="-78"/>
+                <a:cs typeface="Amiri" pitchFamily="2" charset="-78"/>
+              </a:rPr>
               <a:t>Question words: مَا (what) · كَمْ مَرَّةً (how often) · مَاذَا (what) — bullet 2 is about ABILITY, bullet 3 is PAST, bullet 4 is FUTURE + a question.</a:t>
             </a:r>
             <a:endParaRPr lang="en-US" dirty="0"/>
@@ -2508,6 +2520,7 @@
                   <a:srgbClr val="D4AF37"/>
                 </a:solidFill>
                 <a:latin typeface="Amiri" pitchFamily="2" charset="-78"/>
+                <a:ea typeface="Amiri" pitchFamily="2" charset="-78"/>
                 <a:cs typeface="Amiri" pitchFamily="2" charset="-78"/>
               </a:rPr>
               <a:t>م</a:t>
@@ -2714,6 +2727,7 @@
                   <a:srgbClr val="D4AF37"/>
                 </a:solidFill>
                 <a:latin typeface="Amiri" pitchFamily="2" charset="-78"/>
+                <a:ea typeface="Amiri" pitchFamily="2" charset="-78"/>
                 <a:cs typeface="Amiri" pitchFamily="2" charset="-78"/>
               </a:rPr>
               <a:t>وَرْشَةُ الكِتَابَةِ — الهِوَايَاتُ وَوَقْتُ الفَرَاغِ</a:t>
@@ -3171,6 +3185,7 @@
                   <a:srgbClr val="D4AF37"/>
                 </a:solidFill>
                 <a:latin typeface="Amiri" pitchFamily="2" charset="-78"/>
+                <a:ea typeface="Amiri" pitchFamily="2" charset="-78"/>
                 <a:cs typeface="Amiri" pitchFamily="2" charset="-78"/>
               </a:rPr>
               <a:t>م</a:t>
@@ -3491,6 +3506,7 @@
                   <a:srgbClr val="8A6D1E"/>
                 </a:solidFill>
                 <a:latin typeface="Amiri" pitchFamily="2" charset="-78"/>
+                <a:ea typeface="Amiri" pitchFamily="2" charset="-78"/>
                 <a:cs typeface="Amiri" pitchFamily="2" charset="-78"/>
               </a:rPr>
               <a:t>نَمُوذَجُ الإِجَابَةِ</a:t>
@@ -3604,6 +3620,7 @@
                   <a:srgbClr val="1F2A37"/>
                 </a:solidFill>
                 <a:latin typeface="Amiri" pitchFamily="2" charset="-78"/>
+                <a:ea typeface="Amiri" pitchFamily="2" charset="-78"/>
                 <a:cs typeface="Amiri" pitchFamily="2" charset="-78"/>
               </a:rPr>
               <a:t>مَرْحَبًا يَا زَيْدُ،</a:t>
@@ -3623,6 +3640,7 @@
                   <a:srgbClr val="1F2A37"/>
                 </a:solidFill>
                 <a:latin typeface="Amiri" pitchFamily="2" charset="-78"/>
+                <a:ea typeface="Amiri" pitchFamily="2" charset="-78"/>
                 <a:cs typeface="Amiri" pitchFamily="2" charset="-78"/>
               </a:rPr>
               <a:t>كَيْفَ حَالُكَ؟ سَأَلْتَنِي عَنْ هِوَايَاتِي. أُحِبُّ كُرَةَ القَدَمِ كَثِيرًا، وَأَلْعَبُهَا مَعَ فَرِيقِ المَدْرَسَةِ مَرَّتَيْنِ فِي الأُسْبُوعِ. أُحِبُّ القِرَاءَةَ أَيْضًا، وَأَقْرَأُ كُلَّ لَيْلَةٍ قَبْلَ النَّوْمِ. لَا أَسْتَطِيعُ أَنْ أَسْبَحَ جَيِّدًا، لٰكِنِّي أَتَعَلَّمُ الآنَ. أَمْسِ لَعِبْنَا مُبَارَاةً، وَفَازَ فَرِيقُنَا ثَلَاثَةً مُقَابِلَ وَاحِدٍ! الرِّيَاضَةُ مُهِمَّةٌ، لِأَنَّهَا مُفِيدَةٌ لِلصِّحَّةِ. فِي الصَّيْفِ سَأَتَعَلَّمُ التَّصْوِيرَ. وَأَنْتَ، مَا هِوَايَتُكَ؟</a:t>
@@ -3642,6 +3660,7 @@
                   <a:srgbClr val="1F2A37"/>
                 </a:solidFill>
                 <a:latin typeface="Amiri" pitchFamily="2" charset="-78"/>
+                <a:ea typeface="Amiri" pitchFamily="2" charset="-78"/>
                 <a:cs typeface="Amiri" pitchFamily="2" charset="-78"/>
               </a:rPr>
               <a:t>مَعَ السَّلَامَةِ،</a:t>
@@ -3661,6 +3680,7 @@
                   <a:srgbClr val="1F2A37"/>
                 </a:solidFill>
                 <a:latin typeface="Amiri" pitchFamily="2" charset="-78"/>
+                <a:ea typeface="Amiri" pitchFamily="2" charset="-78"/>
                 <a:cs typeface="Amiri" pitchFamily="2" charset="-78"/>
               </a:rPr>
               <a:t>سَامِي</a:t>
@@ -3824,11 +3844,12 @@
               <a:buNone/>
             </a:pPr>
             <a:r>
-              <a:rPr lang="en-US" sz="950" b="1" dirty="0">
+              <a:rPr lang="ar-SA" sz="950" b="1" dirty="0">
                 <a:solidFill>
                   <a:srgbClr val="FFFFFF"/>
                 </a:solidFill>
                 <a:latin typeface="Calibri" pitchFamily="34" charset="0"/>
+                <a:ea typeface="Amiri" pitchFamily="2" charset="-78"/>
                 <a:cs typeface="Amiri" pitchFamily="2" charset="-78"/>
               </a:rPr>
               <a:t>أَلْعَبُهَا … مَرَّتَيْنِ</a:t>
@@ -3889,11 +3910,12 @@
               <a:buNone/>
             </a:pPr>
             <a:r>
-              <a:rPr lang="en-US" sz="950" b="1" dirty="0">
+              <a:rPr lang="ar-SA" sz="950" b="1" dirty="0">
                 <a:solidFill>
                   <a:srgbClr val="FFFFFF"/>
                 </a:solidFill>
                 <a:latin typeface="Calibri" pitchFamily="34" charset="0"/>
+                <a:ea typeface="Amiri" pitchFamily="2" charset="-78"/>
                 <a:cs typeface="Amiri" pitchFamily="2" charset="-78"/>
               </a:rPr>
               <a:t>لَا أَسْتَطِيعُ أَنْ أَسْبَحَ</a:t>
@@ -3954,11 +3976,12 @@
               <a:buNone/>
             </a:pPr>
             <a:r>
-              <a:rPr lang="en-US" sz="950" b="1" dirty="0">
+              <a:rPr lang="ar-SA" sz="950" b="1" dirty="0">
                 <a:solidFill>
                   <a:srgbClr val="FFFFFF"/>
                 </a:solidFill>
                 <a:latin typeface="Calibri" pitchFamily="34" charset="0"/>
+                <a:ea typeface="Amiri" pitchFamily="2" charset="-78"/>
                 <a:cs typeface="Amiri" pitchFamily="2" charset="-78"/>
               </a:rPr>
               <a:t>فَازَ فَرِيقُنَا</a:t>
@@ -4019,11 +4042,12 @@
               <a:buNone/>
             </a:pPr>
             <a:r>
-              <a:rPr lang="en-US" sz="950" b="1" dirty="0">
+              <a:rPr lang="ar-SA" sz="950" b="1" dirty="0">
                 <a:solidFill>
                   <a:srgbClr val="FFFFFF"/>
                 </a:solidFill>
                 <a:latin typeface="Calibri" pitchFamily="34" charset="0"/>
+                <a:ea typeface="Amiri" pitchFamily="2" charset="-78"/>
                 <a:cs typeface="Amiri" pitchFamily="2" charset="-78"/>
               </a:rPr>
               <a:t>سَأَتَعَلَّمُ</a:t>
@@ -4157,6 +4181,7 @@
                   <a:srgbClr val="D4AF37"/>
                 </a:solidFill>
                 <a:latin typeface="Amiri" pitchFamily="2" charset="-78"/>
+                <a:ea typeface="Amiri" pitchFamily="2" charset="-78"/>
                 <a:cs typeface="Amiri" pitchFamily="2" charset="-78"/>
               </a:rPr>
               <a:t>م</a:t>
@@ -4477,6 +4502,7 @@
                   <a:srgbClr val="8A6D1E"/>
                 </a:solidFill>
                 <a:latin typeface="Amiri" pitchFamily="2" charset="-78"/>
+                <a:ea typeface="Amiri" pitchFamily="2" charset="-78"/>
                 <a:cs typeface="Amiri" pitchFamily="2" charset="-78"/>
               </a:rPr>
               <a:t>نَمُوذَجُ الإِجَابَةِ</a:t>
@@ -4590,6 +4616,7 @@
                   <a:srgbClr val="1F2A37"/>
                 </a:solidFill>
                 <a:latin typeface="Amiri" pitchFamily="2" charset="-78"/>
+                <a:ea typeface="Amiri" pitchFamily="2" charset="-78"/>
                 <a:cs typeface="Amiri" pitchFamily="2" charset="-78"/>
               </a:rPr>
               <a:t>عَزِيزِي زَيْدٌ،</a:t>
@@ -4609,6 +4636,7 @@
                   <a:srgbClr val="1F2A37"/>
                 </a:solidFill>
                 <a:latin typeface="Amiri" pitchFamily="2" charset="-78"/>
+                <a:ea typeface="Amiri" pitchFamily="2" charset="-78"/>
                 <a:cs typeface="Amiri" pitchFamily="2" charset="-78"/>
               </a:rPr>
               <a:t>تَحِيَّةً طَيِّبَةً، وَبَعْدُ، فَقَدْ سَأَلْتَنِي كَيْفَ أَقْضِي وَقْتَ فَرَاغِي. أَنَا مَشْغُولٌ جِدًّا؛ أَلْعَبُ كُرَةَ القَدَمِ مَعَ فَرِيقِ المَدْرَسَةِ مَرَّتَيْنِ فِي الأُسْبُوعِ، وَأَتَعَلَّمُ العَزْفَ عَلَى العُودِ يَوْمَ السَّبْتِ مَعَ أُسْتَاذٍ سُورِيٍّ. أَمَّا فِي المَسَاءِ فَأُحِبُّ قِرَاءَةَ الرِّوَايَاتِ البُولِيسِيَّةِ، لِأَنَّهَا تُنْسِينِي ضَغْطَ الدِّرَاسَةِ. أَمْسِ كَانَ يَوْمًا رَائِعًا؛ فَازَ فَرِيقُنَا فِي نِصْفِ نِهَائِيِّ البُطُولَةِ، وَسَجَّلْتُ الهَدَفَ الثَّالِثَ بِرَأْسِي! صَحِيحٌ أَنَّ أَنْشِطَتِي كَثِيرَةٌ، غَيْرَ أَنِّي أُنَظِّمُ وَقْتِي جَيِّدًا. فِي العُطْلَةِ الصَّيْفِيَّةِ سَأُجَرِّبُ هِوَايَةً جَدِيدَةً، وَهِيَ التَّصْوِيرُ. وَأَنْتَ، هَلْ تُمَارِسُ أَيَّ رِيَاضَةٍ؟</a:t>
@@ -4628,6 +4656,7 @@
                   <a:srgbClr val="1F2A37"/>
                 </a:solidFill>
                 <a:latin typeface="Amiri" pitchFamily="2" charset="-78"/>
+                <a:ea typeface="Amiri" pitchFamily="2" charset="-78"/>
                 <a:cs typeface="Amiri" pitchFamily="2" charset="-78"/>
               </a:rPr>
               <a:t>مَعَ تَحِيَّاتِي،</a:t>
@@ -4647,6 +4676,7 @@
                   <a:srgbClr val="1F2A37"/>
                 </a:solidFill>
                 <a:latin typeface="Amiri" pitchFamily="2" charset="-78"/>
+                <a:ea typeface="Amiri" pitchFamily="2" charset="-78"/>
                 <a:cs typeface="Amiri" pitchFamily="2" charset="-78"/>
               </a:rPr>
               <a:t>سَامِي</a:t>
@@ -4810,11 +4840,12 @@
               <a:buNone/>
             </a:pPr>
             <a:r>
-              <a:rPr lang="en-US" sz="950" b="1" dirty="0">
+              <a:rPr lang="ar-SA" sz="950" b="1" dirty="0">
                 <a:solidFill>
                   <a:srgbClr val="FFFFFF"/>
                 </a:solidFill>
                 <a:latin typeface="Calibri" pitchFamily="34" charset="0"/>
+                <a:ea typeface="Amiri" pitchFamily="2" charset="-78"/>
                 <a:cs typeface="Amiri" pitchFamily="2" charset="-78"/>
               </a:rPr>
               <a:t>وَأَتَعَلَّمُ العَزْفَ</a:t>
@@ -4875,11 +4906,12 @@
               <a:buNone/>
             </a:pPr>
             <a:r>
-              <a:rPr lang="en-US" sz="950" b="1" dirty="0">
+              <a:rPr lang="ar-SA" sz="950" b="1" dirty="0">
                 <a:solidFill>
                   <a:srgbClr val="FFFFFF"/>
                 </a:solidFill>
                 <a:latin typeface="Calibri" pitchFamily="34" charset="0"/>
+                <a:ea typeface="Amiri" pitchFamily="2" charset="-78"/>
                 <a:cs typeface="Amiri" pitchFamily="2" charset="-78"/>
               </a:rPr>
               <a:t>أَمَّا فِي المَسَاءِ فَأُحِبُّ</a:t>
@@ -4940,11 +4972,12 @@
               <a:buNone/>
             </a:pPr>
             <a:r>
-              <a:rPr lang="en-US" sz="950" b="1" dirty="0">
+              <a:rPr lang="ar-SA" sz="950" b="1" dirty="0">
                 <a:solidFill>
                   <a:srgbClr val="FFFFFF"/>
                 </a:solidFill>
                 <a:latin typeface="Calibri" pitchFamily="34" charset="0"/>
+                <a:ea typeface="Amiri" pitchFamily="2" charset="-78"/>
                 <a:cs typeface="Amiri" pitchFamily="2" charset="-78"/>
               </a:rPr>
               <a:t>سَجَّلْتُ الهَدَفَ</a:t>
@@ -5005,11 +5038,12 @@
               <a:buNone/>
             </a:pPr>
             <a:r>
-              <a:rPr lang="en-US" sz="950" b="1" dirty="0">
+              <a:rPr lang="ar-SA" sz="950" b="1" dirty="0">
                 <a:solidFill>
                   <a:srgbClr val="FFFFFF"/>
                 </a:solidFill>
                 <a:latin typeface="Calibri" pitchFamily="34" charset="0"/>
+                <a:ea typeface="Amiri" pitchFamily="2" charset="-78"/>
                 <a:cs typeface="Amiri" pitchFamily="2" charset="-78"/>
               </a:rPr>
               <a:t>صَحِيحٌ أَنَّ … غَيْرَ أَنِّي</a:t>
@@ -5143,6 +5177,7 @@
                   <a:srgbClr val="D4AF37"/>
                 </a:solidFill>
                 <a:latin typeface="Amiri" pitchFamily="2" charset="-78"/>
+                <a:ea typeface="Amiri" pitchFamily="2" charset="-78"/>
                 <a:cs typeface="Amiri" pitchFamily="2" charset="-78"/>
               </a:rPr>
               <a:t>م</a:t>
@@ -5463,6 +5498,7 @@
                   <a:srgbClr val="8A6D1E"/>
                 </a:solidFill>
                 <a:latin typeface="Amiri" pitchFamily="2" charset="-78"/>
+                <a:ea typeface="Amiri" pitchFamily="2" charset="-78"/>
                 <a:cs typeface="Amiri" pitchFamily="2" charset="-78"/>
               </a:rPr>
               <a:t>اخْتَرْ عُنْوَانًا وَاحِدًا</a:t>
@@ -5743,6 +5779,7 @@
                   <a:srgbClr val="1B3B6F"/>
                 </a:solidFill>
                 <a:latin typeface="Amiri" pitchFamily="2" charset="-78"/>
+                <a:ea typeface="Amiri" pitchFamily="2" charset="-78"/>
                 <a:cs typeface="Amiri" pitchFamily="2" charset="-78"/>
               </a:rPr>
               <a:t>هِوَايَتِي المُفَضَّلَةُ</a:t>
@@ -5781,6 +5818,7 @@
                   <a:srgbClr val="1B3B6F"/>
                 </a:solidFill>
                 <a:latin typeface="Amiri" pitchFamily="2" charset="-78"/>
+                <a:ea typeface="Amiri" pitchFamily="2" charset="-78"/>
                 <a:cs typeface="Amiri" pitchFamily="2" charset="-78"/>
               </a:rPr>
               <a:t>(أ)</a:t>
@@ -5887,6 +5925,7 @@
                   <a:srgbClr val="1B3B6F"/>
                 </a:solidFill>
                 <a:latin typeface="Amiri" pitchFamily="2" charset="-78"/>
+                <a:ea typeface="Amiri" pitchFamily="2" charset="-78"/>
                 <a:cs typeface="Amiri" pitchFamily="2" charset="-78"/>
               </a:rPr>
               <a:t>مَا هِوَايَتُكَ؟ وَكَمْ مَرَّةً تُمَارِسُهَا؟ · هِوَايَاتٌ وَرِيَاضَاتٌ أُخْرَى · كَيْفَ بَدَأْتَ؟ وَإِنْجَازٌ أَوْ ذِكْرَى · لِمَاذَا هِيَ مُهِمَّةٌ؟ وَخُطَطُكَ</a:t>
@@ -6018,6 +6057,7 @@
                   <a:srgbClr val="1B3B6F"/>
                 </a:solidFill>
                 <a:latin typeface="Amiri" pitchFamily="2" charset="-78"/>
+                <a:ea typeface="Amiri" pitchFamily="2" charset="-78"/>
                 <a:cs typeface="Amiri" pitchFamily="2" charset="-78"/>
               </a:rPr>
               <a:t>وَقْتُ الفَرَاغِ: بَيْنَ الشَّاشَةِ وَالحَيَاةِ</a:t>
@@ -6056,6 +6096,7 @@
                   <a:srgbClr val="1B3B6F"/>
                 </a:solidFill>
                 <a:latin typeface="Amiri" pitchFamily="2" charset="-78"/>
+                <a:ea typeface="Amiri" pitchFamily="2" charset="-78"/>
                 <a:cs typeface="Amiri" pitchFamily="2" charset="-78"/>
               </a:rPr>
               <a:t>(ب)</a:t>
@@ -6162,6 +6203,7 @@
                   <a:srgbClr val="1B3B6F"/>
                 </a:solidFill>
                 <a:latin typeface="Amiri" pitchFamily="2" charset="-78"/>
+                <a:ea typeface="Amiri" pitchFamily="2" charset="-78"/>
                 <a:cs typeface="Amiri" pitchFamily="2" charset="-78"/>
               </a:rPr>
               <a:t>كَيْفَ يَقْضِي الشَّبَابُ وَقْتَ فَرَاغِهِمْ؟ · المَاضِي وَالحَاضِرُ · تَجْرِبَةٌ مِنْ أُسْرَتِكَ أَوْ مَدْرَسَتِكَ · رَأْيُكَ وَاقْتِرَاحُكَ</a:t>
@@ -6361,6 +6403,7 @@
                   <a:srgbClr val="D4AF37"/>
                 </a:solidFill>
                 <a:latin typeface="Amiri" pitchFamily="2" charset="-78"/>
+                <a:ea typeface="Amiri" pitchFamily="2" charset="-78"/>
                 <a:cs typeface="Amiri" pitchFamily="2" charset="-78"/>
               </a:rPr>
               <a:t>م</a:t>
@@ -6681,6 +6724,7 @@
                   <a:srgbClr val="8A6D1E"/>
                 </a:solidFill>
                 <a:latin typeface="Amiri" pitchFamily="2" charset="-78"/>
+                <a:ea typeface="Amiri" pitchFamily="2" charset="-78"/>
                 <a:cs typeface="Amiri" pitchFamily="2" charset="-78"/>
               </a:rPr>
               <a:t>خُطَّةُ الكِتَابَةِ</a:t>
@@ -7305,6 +7349,7 @@
                   <a:srgbClr val="1B3B6F"/>
                 </a:solidFill>
                 <a:latin typeface="Amiri" pitchFamily="2" charset="-78"/>
+                <a:ea typeface="Amiri" pitchFamily="2" charset="-78"/>
                 <a:cs typeface="Amiri" pitchFamily="2" charset="-78"/>
               </a:rPr>
               <a:t>أَسْبَحُ مَرَّتَيْنِ فِي الأُسْبُوعِ.</a:t>
@@ -7404,6 +7449,7 @@
                   <a:srgbClr val="1B3B6F"/>
                 </a:solidFill>
                 <a:latin typeface="Amiri" pitchFamily="2" charset="-78"/>
+                <a:ea typeface="Amiri" pitchFamily="2" charset="-78"/>
                 <a:cs typeface="Amiri" pitchFamily="2" charset="-78"/>
               </a:rPr>
               <a:t>بَدَأْتُ الرَّسْمَ عِنْدَمَا كُنْتُ فِي الثَّامِنَةِ.</a:t>
@@ -7503,6 +7549,7 @@
                   <a:srgbClr val="1B3B6F"/>
                 </a:solidFill>
                 <a:latin typeface="Amiri" pitchFamily="2" charset="-78"/>
+                <a:ea typeface="Amiri" pitchFamily="2" charset="-78"/>
                 <a:cs typeface="Amiri" pitchFamily="2" charset="-78"/>
               </a:rPr>
               <a:t>سَأُجَرِّبُ التَّصْوِيرَ فِي الصَّيْفِ.</a:t>
@@ -7664,6 +7711,7 @@
                   <a:srgbClr val="1F2A37"/>
                 </a:solidFill>
                 <a:latin typeface="Amiri" pitchFamily="2" charset="-78"/>
+                <a:ea typeface="Amiri" pitchFamily="2" charset="-78"/>
                 <a:cs typeface="Amiri" pitchFamily="2" charset="-78"/>
               </a:rPr>
               <a:t>أ</a:t>
@@ -7690,6 +7738,7 @@
                   <a:srgbClr val="1F2A37"/>
                 </a:solidFill>
                 <a:latin typeface="Amiri" pitchFamily="2" charset="-78"/>
+                <a:ea typeface="Amiri" pitchFamily="2" charset="-78"/>
                 <a:cs typeface="Amiri" pitchFamily="2" charset="-78"/>
               </a:rPr>
               <a:t>ب</a:t>
@@ -7836,6 +7885,7 @@
                   <a:srgbClr val="D4AF37"/>
                 </a:solidFill>
                 <a:latin typeface="Amiri" pitchFamily="2" charset="-78"/>
+                <a:ea typeface="Amiri" pitchFamily="2" charset="-78"/>
                 <a:cs typeface="Amiri" pitchFamily="2" charset="-78"/>
               </a:rPr>
               <a:t>م</a:t>
@@ -8093,6 +8143,7 @@
                   <a:srgbClr val="8A6D1E"/>
                 </a:solidFill>
                 <a:latin typeface="Amiri" pitchFamily="2" charset="-78"/>
+                <a:ea typeface="Amiri" pitchFamily="2" charset="-78"/>
                 <a:cs typeface="Amiri" pitchFamily="2" charset="-78"/>
               </a:rPr>
               <a:t>أ</a:t>
@@ -8157,6 +8208,7 @@
                   <a:srgbClr val="1B3B6F"/>
                 </a:solidFill>
                 <a:latin typeface="Amiri" pitchFamily="2" charset="-78"/>
+                <a:ea typeface="Amiri" pitchFamily="2" charset="-78"/>
                 <a:cs typeface="Amiri" pitchFamily="2" charset="-78"/>
               </a:rPr>
               <a:t>أ</a:t>
@@ -8208,6 +8260,7 @@
                   <a:srgbClr val="8A6D1E"/>
                 </a:solidFill>
                 <a:latin typeface="Amiri" pitchFamily="2" charset="-78"/>
+                <a:ea typeface="Amiri" pitchFamily="2" charset="-78"/>
                 <a:cs typeface="Amiri" pitchFamily="2" charset="-78"/>
               </a:rPr>
               <a:t>نَمُوذَجُ الإِجَابَةِ</a:t>
@@ -8321,6 +8374,7 @@
                   <a:srgbClr val="1F2A37"/>
                 </a:solidFill>
                 <a:latin typeface="Amiri" pitchFamily="2" charset="-78"/>
+                <a:ea typeface="Amiri" pitchFamily="2" charset="-78"/>
                 <a:cs typeface="Amiri" pitchFamily="2" charset="-78"/>
               </a:rPr>
               <a:t>عِنْدِي هِوَايَاتٌ كَثِيرَةٌ، لٰكِنَّ هِوَايَتِيَ المُفَضَّلَةَ هِيَ الرَّسْمُ. أَرْسُمُ كُلَّ يَوْمٍ تَقْرِيبًا بَعْدَ الوَاجِبَاتِ. أَرْسُمُ الطَّبِيعَةَ وَالحَيَوَانَاتِ، وَأَسْتَعْمِلُ الأَلْوَانَ المَائِيَّةَ. أُحِبُّ الرَّسْمَ، لِأَنَّهُ يُرِيحُنِي وَيَجْعَلُنِي سَعِيدَةً، وَأُعَلِّقُ لَوْحَاتِي عَلَى جُدْرَانِ غُرْفَتِي.</a:t>
@@ -8340,6 +8394,7 @@
                   <a:srgbClr val="1F2A37"/>
                 </a:solidFill>
                 <a:latin typeface="Amiri" pitchFamily="2" charset="-78"/>
+                <a:ea typeface="Amiri" pitchFamily="2" charset="-78"/>
                 <a:cs typeface="Amiri" pitchFamily="2" charset="-78"/>
               </a:rPr>
               <a:t>أُمَارِسُ الرِّيَاضَةَ أَيْضًا. أَسْبَحُ مَرَّتَيْنِ فِي الأُسْبُوعِ فِي النَّادِي، وَأَمْشِي مَعَ أُمِّي فِي الحَدِيقَةِ يَوْمَ الجُمُعَةِ. لَا أُحِبُّ كُرَةَ القَدَمِ، لٰكِنِّي أُحِبُّ كُرَةَ الطَّائِرَةِ، وَأَلْعَبُهَا مَعَ صَدِيقَاتِي فِي المَدْرَسَةِ.</a:t>
@@ -8359,6 +8414,7 @@
                   <a:srgbClr val="1F2A37"/>
                 </a:solidFill>
                 <a:latin typeface="Amiri" pitchFamily="2" charset="-78"/>
+                <a:ea typeface="Amiri" pitchFamily="2" charset="-78"/>
                 <a:cs typeface="Amiri" pitchFamily="2" charset="-78"/>
               </a:rPr>
               <a:t>بَدَأْتُ الرَّسْمَ عِنْدَمَا كُنْتُ فِي الثَّامِنَةِ مِنْ عُمْرِي. فِي السَّنَةِ المَاضِيَةِ شَارَكْتُ فِي مُسَابَقَةٍ فِي المَدْرَسَةِ، وَرَسَمْتُ شَجَرَةً كَبِيرَةً فِي الخَرِيفِ. فُزْتُ بِالمَرْكَزِ الأَوَّلِ، وَكَانَتْ أُسْرَتِي فَخُورَةً بِي، وَعَلَّقَتِ المُعَلِّمَةُ لَوْحَتِي فِي مَكْتَبَةِ المَدْرَسَةِ.</a:t>
@@ -8378,6 +8434,7 @@
                   <a:srgbClr val="1F2A37"/>
                 </a:solidFill>
                 <a:latin typeface="Amiri" pitchFamily="2" charset="-78"/>
+                <a:ea typeface="Amiri" pitchFamily="2" charset="-78"/>
                 <a:cs typeface="Amiri" pitchFamily="2" charset="-78"/>
               </a:rPr>
               <a:t>فِي رَأْيِي، الهِوَايَاتُ مُهِمَّةٌ جِدًّا، لِأَنَّهَا تُعَلِّمُنَا الصَّبْرَ. فِي المُسْتَقْبَلِ أُرِيدُ أَنْ أَدْرُسَ الفَنَّ، وَسَأَرْسُمُ لَوْحَاتٍ كَبِيرَةً لِلْمَعَارِضِ.</a:t>
@@ -8541,11 +8598,12 @@
               <a:buNone/>
             </a:pPr>
             <a:r>
-              <a:rPr lang="en-US" sz="950" b="1" dirty="0">
+              <a:rPr lang="ar-SA" sz="950" b="1" dirty="0">
                 <a:solidFill>
                   <a:srgbClr val="FFFFFF"/>
                 </a:solidFill>
                 <a:latin typeface="Calibri" pitchFamily="34" charset="0"/>
+                <a:ea typeface="Amiri" pitchFamily="2" charset="-78"/>
                 <a:cs typeface="Amiri" pitchFamily="2" charset="-78"/>
               </a:rPr>
               <a:t>أَرْسُمُ كُلَّ يَوْمٍ</a:t>
@@ -8606,11 +8664,12 @@
               <a:buNone/>
             </a:pPr>
             <a:r>
-              <a:rPr lang="en-US" sz="950" b="1" dirty="0">
+              <a:rPr lang="ar-SA" sz="950" b="1" dirty="0">
                 <a:solidFill>
                   <a:srgbClr val="FFFFFF"/>
                 </a:solidFill>
                 <a:latin typeface="Calibri" pitchFamily="34" charset="0"/>
+                <a:ea typeface="Amiri" pitchFamily="2" charset="-78"/>
                 <a:cs typeface="Amiri" pitchFamily="2" charset="-78"/>
               </a:rPr>
               <a:t>مَرَّتَيْنِ فِي الأُسْبُوعِ</a:t>
@@ -8671,11 +8730,12 @@
               <a:buNone/>
             </a:pPr>
             <a:r>
-              <a:rPr lang="en-US" sz="950" b="1" dirty="0">
+              <a:rPr lang="ar-SA" sz="950" b="1" dirty="0">
                 <a:solidFill>
                   <a:srgbClr val="FFFFFF"/>
                 </a:solidFill>
                 <a:latin typeface="Calibri" pitchFamily="34" charset="0"/>
+                <a:ea typeface="Amiri" pitchFamily="2" charset="-78"/>
                 <a:cs typeface="Amiri" pitchFamily="2" charset="-78"/>
               </a:rPr>
               <a:t>بَدَأْتُ الرَّسْمَ عِنْدَمَا</a:t>
@@ -8736,11 +8796,12 @@
               <a:buNone/>
             </a:pPr>
             <a:r>
-              <a:rPr lang="en-US" sz="950" b="1" dirty="0">
+              <a:rPr lang="ar-SA" sz="950" b="1" dirty="0">
                 <a:solidFill>
                   <a:srgbClr val="FFFFFF"/>
                 </a:solidFill>
                 <a:latin typeface="Calibri" pitchFamily="34" charset="0"/>
+                <a:ea typeface="Amiri" pitchFamily="2" charset="-78"/>
                 <a:cs typeface="Amiri" pitchFamily="2" charset="-78"/>
               </a:rPr>
               <a:t>سَأَرْسُمُ</a:t>
@@ -8874,6 +8935,7 @@
                   <a:srgbClr val="D4AF37"/>
                 </a:solidFill>
                 <a:latin typeface="Amiri" pitchFamily="2" charset="-78"/>
+                <a:ea typeface="Amiri" pitchFamily="2" charset="-78"/>
                 <a:cs typeface="Amiri" pitchFamily="2" charset="-78"/>
               </a:rPr>
               <a:t>م</a:t>
@@ -9131,6 +9193,7 @@
                   <a:srgbClr val="8A6D1E"/>
                 </a:solidFill>
                 <a:latin typeface="Amiri" pitchFamily="2" charset="-78"/>
+                <a:ea typeface="Amiri" pitchFamily="2" charset="-78"/>
                 <a:cs typeface="Amiri" pitchFamily="2" charset="-78"/>
               </a:rPr>
               <a:t>أ</a:t>
@@ -9195,6 +9258,7 @@
                   <a:srgbClr val="1B3B6F"/>
                 </a:solidFill>
                 <a:latin typeface="Amiri" pitchFamily="2" charset="-78"/>
+                <a:ea typeface="Amiri" pitchFamily="2" charset="-78"/>
                 <a:cs typeface="Amiri" pitchFamily="2" charset="-78"/>
               </a:rPr>
               <a:t>أ</a:t>
@@ -9246,6 +9310,7 @@
                   <a:srgbClr val="8A6D1E"/>
                 </a:solidFill>
                 <a:latin typeface="Amiri" pitchFamily="2" charset="-78"/>
+                <a:ea typeface="Amiri" pitchFamily="2" charset="-78"/>
                 <a:cs typeface="Amiri" pitchFamily="2" charset="-78"/>
               </a:rPr>
               <a:t>نَمُوذَجُ الإِجَابَةِ</a:t>
@@ -9359,6 +9424,7 @@
                   <a:srgbClr val="1F2A37"/>
                 </a:solidFill>
                 <a:latin typeface="Amiri" pitchFamily="2" charset="-78"/>
+                <a:ea typeface="Amiri" pitchFamily="2" charset="-78"/>
                 <a:cs typeface="Amiri" pitchFamily="2" charset="-78"/>
               </a:rPr>
               <a:t>قَبْلَ ثَلَاثِ سَنَوَاتٍ كُنْتُ أَقْضِي وَقْتَ فَرَاغِي كُلَّهُ أَمَامَ الهَاتِفِ، أَتَنَقَّلُ مِنْ فِيدْيُو إِلَى آخَرَ دُونَ هَدَفٍ. ثُمَّ أَهْدَانِي خَالِي كَامِيرَا قَدِيمَةً، فَتَغَيَّرَ كُلُّ شَيْءٍ؛ فَقَدْ بَدَأْتُ أَرَى الأَشْيَاءَ مِنْ حَوْلِي بِعُيُونٍ جَدِيدَةٍ.</a:t>
@@ -9378,6 +9444,7 @@
                   <a:srgbClr val="1F2A37"/>
                 </a:solidFill>
                 <a:latin typeface="Amiri" pitchFamily="2" charset="-78"/>
+                <a:ea typeface="Amiri" pitchFamily="2" charset="-78"/>
                 <a:cs typeface="Amiri" pitchFamily="2" charset="-78"/>
               </a:rPr>
               <a:t>اليَوْمَ أَصْبَحَ التَّصْوِيرُ هِوَايَتِيَ المُفَضَّلَةَ؛ أَخْرُجُ كُلَّ يَوْمِ سَبْتٍ مَعَ مَجْمُوعَةٍ مِنَ المُصَوِّرِينَ الشَّبَابِ، فَنَمْشِي سَاعَاتٍ فِي الحَدَائِقِ وَالأَسْوَاقِ بَحْثًا عَنِ اللَّقْطَةِ المِثَالِيَّةِ. أَمَّا فِي أَيَّامِ الدِّرَاسَةِ فَأَسْبَحُ مَرَّتَيْنِ فِي الأُسْبُوعِ، لِأَنَّ السِّبَاحَةَ تُصَفِّي ذِهْنِي، وَتُسَاعِدُنِي عَلَى النَّوْمِ جَيِّدًا قَبْلَ الامْتِحَانَاتِ.</a:t>
@@ -9397,6 +9464,7 @@
                   <a:srgbClr val="1F2A37"/>
                 </a:solidFill>
                 <a:latin typeface="Amiri" pitchFamily="2" charset="-78"/>
+                <a:ea typeface="Amiri" pitchFamily="2" charset="-78"/>
                 <a:cs typeface="Amiri" pitchFamily="2" charset="-78"/>
               </a:rPr>
               <a:t>أَكْثَرُ لَحْظَةٍ فَخَرْتُ بِهَا كَانَتْ فِي الرَّبِيعِ المَاضِي، عِنْدَمَا شَارَكْتُ بِصُورَةٍ لِجَدِّي وَهُوَ يَعْمَلُ فِي حَدِيقَتِهِ فِي مُسَابَقَةٍ وَطَنِيَّةٍ لِلشَّبَابِ، فَاخْتَارَتْهَا اللَّجْنَةُ ضِمْنَ أَفْضَلِ عَشْرِ صُوَرٍ، وَعُرِضَتْ فِي مَعْرِضٍ فِي لَنْدَنَ.</a:t>
@@ -9416,6 +9484,7 @@
                   <a:srgbClr val="1F2A37"/>
                 </a:solidFill>
                 <a:latin typeface="Amiri" pitchFamily="2" charset="-78"/>
+                <a:ea typeface="Amiri" pitchFamily="2" charset="-78"/>
                 <a:cs typeface="Amiri" pitchFamily="2" charset="-78"/>
               </a:rPr>
               <a:t>صَحِيحٌ أَنَّ الهِوَايَاتِ تَأْخُذُ وَقْتًا كَانَ يُمْكِنُ أَنْ أَدْرُسَ فِيهِ، غَيْرَ أَنَّهَا عَلَّمَتْنِي الصَّبْرَ وَالمُلَاحَظَةَ. وَلَوْ لَمْ يُهْدِنِي خَالِي تِلْكَ الكَامِيرَا، لَكُنْتُ مَا زِلْتُ أُضَيِّعُ وَقْتِي أَمَامَ الشَّاشَةِ.</a:t>
@@ -9514,11 +9583,12 @@
               <a:buNone/>
             </a:pPr>
             <a:r>
-              <a:rPr lang="en-US" sz="950" b="1" dirty="0">
+              <a:rPr lang="ar-SA" sz="950" b="1" dirty="0">
                 <a:solidFill>
                   <a:srgbClr val="FFFFFF"/>
                 </a:solidFill>
                 <a:latin typeface="Calibri" pitchFamily="34" charset="0"/>
+                <a:ea typeface="Amiri" pitchFamily="2" charset="-78"/>
                 <a:cs typeface="Amiri" pitchFamily="2" charset="-78"/>
               </a:rPr>
               <a:t>كُنْتُ أَقْضِي … أَتَنَقَّلُ</a:t>
@@ -9579,11 +9649,12 @@
               <a:buNone/>
             </a:pPr>
             <a:r>
-              <a:rPr lang="en-US" sz="950" b="1" dirty="0">
+              <a:rPr lang="ar-SA" sz="950" b="1" dirty="0">
                 <a:solidFill>
                   <a:srgbClr val="FFFFFF"/>
                 </a:solidFill>
                 <a:latin typeface="Calibri" pitchFamily="34" charset="0"/>
+                <a:ea typeface="Amiri" pitchFamily="2" charset="-78"/>
                 <a:cs typeface="Amiri" pitchFamily="2" charset="-78"/>
               </a:rPr>
               <a:t>بَحْثًا عَنِ</a:t>
@@ -9644,11 +9715,12 @@
               <a:buNone/>
             </a:pPr>
             <a:r>
-              <a:rPr lang="en-US" sz="950" b="1" dirty="0">
+              <a:rPr lang="ar-SA" sz="950" b="1" dirty="0">
                 <a:solidFill>
                   <a:srgbClr val="FFFFFF"/>
                 </a:solidFill>
                 <a:latin typeface="Calibri" pitchFamily="34" charset="0"/>
+                <a:ea typeface="Amiri" pitchFamily="2" charset="-78"/>
                 <a:cs typeface="Amiri" pitchFamily="2" charset="-78"/>
               </a:rPr>
               <a:t>وَعُرِضَتْ فِي مَعْرِضٍ</a:t>
@@ -9709,11 +9781,12 @@
               <a:buNone/>
             </a:pPr>
             <a:r>
-              <a:rPr lang="en-US" sz="950" b="1" dirty="0">
+              <a:rPr lang="ar-SA" sz="950" b="1" dirty="0">
                 <a:solidFill>
                   <a:srgbClr val="FFFFFF"/>
                 </a:solidFill>
                 <a:latin typeface="Calibri" pitchFamily="34" charset="0"/>
+                <a:ea typeface="Amiri" pitchFamily="2" charset="-78"/>
                 <a:cs typeface="Amiri" pitchFamily="2" charset="-78"/>
               </a:rPr>
               <a:t>لَوْ لَمْ يُهْدِنِي … لَكُنْتُ</a:t>
@@ -9847,6 +9920,7 @@
                   <a:srgbClr val="D4AF37"/>
                 </a:solidFill>
                 <a:latin typeface="Amiri" pitchFamily="2" charset="-78"/>
+                <a:ea typeface="Amiri" pitchFamily="2" charset="-78"/>
                 <a:cs typeface="Amiri" pitchFamily="2" charset="-78"/>
               </a:rPr>
               <a:t>م</a:t>
@@ -10104,6 +10178,7 @@
                   <a:srgbClr val="8A6D1E"/>
                 </a:solidFill>
                 <a:latin typeface="Amiri" pitchFamily="2" charset="-78"/>
+                <a:ea typeface="Amiri" pitchFamily="2" charset="-78"/>
                 <a:cs typeface="Amiri" pitchFamily="2" charset="-78"/>
               </a:rPr>
               <a:t>ب</a:t>
@@ -10168,6 +10243,7 @@
                   <a:srgbClr val="1B3B6F"/>
                 </a:solidFill>
                 <a:latin typeface="Amiri" pitchFamily="2" charset="-78"/>
+                <a:ea typeface="Amiri" pitchFamily="2" charset="-78"/>
                 <a:cs typeface="Amiri" pitchFamily="2" charset="-78"/>
               </a:rPr>
               <a:t>ب</a:t>
@@ -10219,6 +10295,7 @@
                   <a:srgbClr val="8A6D1E"/>
                 </a:solidFill>
                 <a:latin typeface="Amiri" pitchFamily="2" charset="-78"/>
+                <a:ea typeface="Amiri" pitchFamily="2" charset="-78"/>
                 <a:cs typeface="Amiri" pitchFamily="2" charset="-78"/>
               </a:rPr>
               <a:t>نَمُوذَجُ الإِجَابَةِ</a:t>
@@ -10332,6 +10409,7 @@
                   <a:srgbClr val="1F2A37"/>
                 </a:solidFill>
                 <a:latin typeface="Amiri" pitchFamily="2" charset="-78"/>
+                <a:ea typeface="Amiri" pitchFamily="2" charset="-78"/>
                 <a:cs typeface="Amiri" pitchFamily="2" charset="-78"/>
               </a:rPr>
               <a:t>تَغَيَّرَتْ طَرِيقَةُ قَضَاءِ وَقْتِ الفَرَاغِ تَغَيُّرًا كَبِيرًا فِي السَّنَوَاتِ الأَخِيرَةِ. فَتُشِيرُ الدِّرَاسَاتُ إِلَى أَنَّ المُرَاهِقَ يَقْضِي أَكْثَرَ مِنْ سِتِّ سَاعَاتٍ يَوْمِيًّا أَمَامَ الشَّاشَاتِ، بَيْنَمَا تَقِلُّ الأَنْشِطَةُ الرِّيَاضِيَّةُ وَالفَنِّيَّةُ عَامًا بَعْدَ عَامٍ.</a:t>
@@ -10351,6 +10429,7 @@
                   <a:srgbClr val="1F2A37"/>
                 </a:solidFill>
                 <a:latin typeface="Amiri" pitchFamily="2" charset="-78"/>
+                <a:ea typeface="Amiri" pitchFamily="2" charset="-78"/>
                 <a:cs typeface="Amiri" pitchFamily="2" charset="-78"/>
               </a:rPr>
               <a:t>فِي المَاضِي كَانَ الأَطْفَالُ يَلْعَبُونَ فِي الشَّوَارِعِ وَالسَّاحَاتِ، وَيَصْنَعُونَ أَلْعَابَهُمْ بِأَيْدِيهِمْ، أَمَّا اليَوْمَ فَيَجْلِسُ كُلُّ وَاحِدٍ فِي غُرْفَتِهِ مَعَ هَاتِفِهِ، حَتَّى عِنْدَمَا يَزُورُهُ أَصْدِقَاؤُهُ، فَيَجْلِسُونَ مَعًا وَكُلٌّ مِنْهُمْ يَنْظُرُ إِلَى شَاشَتِهِ.</a:t>
@@ -10370,6 +10449,7 @@
                   <a:srgbClr val="1F2A37"/>
                 </a:solidFill>
                 <a:latin typeface="Amiri" pitchFamily="2" charset="-78"/>
+                <a:ea typeface="Amiri" pitchFamily="2" charset="-78"/>
                 <a:cs typeface="Amiri" pitchFamily="2" charset="-78"/>
               </a:rPr>
               <a:t>لَاحَظْتُ ذٰلِكَ فِي أُسْرَتِي؛ فَأَخِي الصَّغِيرُ كَانَ يَقْضِي عُطَلَهُ كُلَّهَا فِي أَلْعَابِ الفِيدْيُو، حَتَّى سَجَّلَهُ أَبِي فِي نَادٍ لِكُرَةِ السَّلَّةِ. فِي البِدَايَةِ رَفَضَ، لٰكِنَّهُ الآنَ يَنْتَظِرُ التَّدْرِيبَ بِشَوْقٍ، وَأَصْبَحَ لَهُ أَصْدِقَاءُ جُدُدٌ، وَتَحَسَّنَ نَوْمُهُ كَثِيرًا.</a:t>
@@ -10389,6 +10469,7 @@
                   <a:srgbClr val="1F2A37"/>
                 </a:solidFill>
                 <a:latin typeface="Amiri" pitchFamily="2" charset="-78"/>
+                <a:ea typeface="Amiri" pitchFamily="2" charset="-78"/>
                 <a:cs typeface="Amiri" pitchFamily="2" charset="-78"/>
               </a:rPr>
               <a:t>صَحِيحٌ أَنَّ بَعْضَ الأَلْعَابِ الإِلِكْتِرُونِيَّةِ مُفِيدَةٌ لِلتَّفْكِيرِ، غَيْرَ أَنَّ الجِسْمَ يَحْتَاجُ إِلَى الحَرَكَةِ، وَالرُّوحَ تَحْتَاجُ إِلَى النَّاسِ وَالضَّحِكِ وَالهَوَاءِ الطَّلْقِ. وَلَوْ وَفَّرَتِ المَدَارِسُ أَنْشِطَةً مَجَّانِيَّةً بَعْدَ الدَّوَامِ، لَوَجَدَ كُلُّ طَالِبٍ هِوَايَةً تُبْعِدُهُ عَنِ الشَّاشَةِ.</a:t>
@@ -10487,11 +10568,12 @@
               <a:buNone/>
             </a:pPr>
             <a:r>
-              <a:rPr lang="en-US" sz="950" b="1" dirty="0">
+              <a:rPr lang="ar-SA" sz="950" b="1" dirty="0">
                 <a:solidFill>
                   <a:srgbClr val="FFFFFF"/>
                 </a:solidFill>
                 <a:latin typeface="Calibri" pitchFamily="34" charset="0"/>
+                <a:ea typeface="Amiri" pitchFamily="2" charset="-78"/>
                 <a:cs typeface="Amiri" pitchFamily="2" charset="-78"/>
               </a:rPr>
               <a:t>بَيْنَمَا تَقِلُّ</a:t>
@@ -10552,11 +10634,12 @@
               <a:buNone/>
             </a:pPr>
             <a:r>
-              <a:rPr lang="en-US" sz="950" b="1" dirty="0">
+              <a:rPr lang="ar-SA" sz="950" b="1" dirty="0">
                 <a:solidFill>
                   <a:srgbClr val="FFFFFF"/>
                 </a:solidFill>
                 <a:latin typeface="Calibri" pitchFamily="34" charset="0"/>
+                <a:ea typeface="Amiri" pitchFamily="2" charset="-78"/>
                 <a:cs typeface="Amiri" pitchFamily="2" charset="-78"/>
               </a:rPr>
               <a:t>أَمَّا اليَوْمَ فَيَجْلِسُ</a:t>
@@ -10617,11 +10700,12 @@
               <a:buNone/>
             </a:pPr>
             <a:r>
-              <a:rPr lang="en-US" sz="950" b="1" dirty="0">
+              <a:rPr lang="ar-SA" sz="950" b="1" dirty="0">
                 <a:solidFill>
                   <a:srgbClr val="FFFFFF"/>
                 </a:solidFill>
                 <a:latin typeface="Calibri" pitchFamily="34" charset="0"/>
+                <a:ea typeface="Amiri" pitchFamily="2" charset="-78"/>
                 <a:cs typeface="Amiri" pitchFamily="2" charset="-78"/>
               </a:rPr>
               <a:t>حَتَّى سَجَّلَهُ أَبِي</a:t>
@@ -10682,11 +10766,12 @@
               <a:buNone/>
             </a:pPr>
             <a:r>
-              <a:rPr lang="en-US" sz="950" b="1" dirty="0">
+              <a:rPr lang="ar-SA" sz="950" b="1" dirty="0">
                 <a:solidFill>
                   <a:srgbClr val="FFFFFF"/>
                 </a:solidFill>
                 <a:latin typeface="Calibri" pitchFamily="34" charset="0"/>
+                <a:ea typeface="Amiri" pitchFamily="2" charset="-78"/>
                 <a:cs typeface="Amiri" pitchFamily="2" charset="-78"/>
               </a:rPr>
               <a:t>لَوْ وَفَّرَتِ … لَوَجَدَ</a:t>
@@ -10820,6 +10905,7 @@
                   <a:srgbClr val="D4AF37"/>
                 </a:solidFill>
                 <a:latin typeface="Amiri" pitchFamily="2" charset="-78"/>
+                <a:ea typeface="Amiri" pitchFamily="2" charset="-78"/>
                 <a:cs typeface="Amiri" pitchFamily="2" charset="-78"/>
               </a:rPr>
               <a:t>م</a:t>
@@ -11140,6 +11226,7 @@
                   <a:srgbClr val="8A6D1E"/>
                 </a:solidFill>
                 <a:latin typeface="Amiri" pitchFamily="2" charset="-78"/>
+                <a:ea typeface="Amiri" pitchFamily="2" charset="-78"/>
                 <a:cs typeface="Amiri" pitchFamily="2" charset="-78"/>
               </a:rPr>
               <a:t>قَيِّمْ عَمَلَكَ</a:t>
@@ -12384,6 +12471,7 @@
                   <a:srgbClr val="FFFFFF"/>
                 </a:solidFill>
                 <a:latin typeface="Amiri" pitchFamily="2" charset="-78"/>
+                <a:ea typeface="Amiri" pitchFamily="2" charset="-78"/>
                 <a:cs typeface="Amiri" pitchFamily="2" charset="-78"/>
               </a:rPr>
               <a:t>أَحْسَنْتُمْ! إِلَى اللِّقَاءِ</a:t>
@@ -12536,6 +12624,7 @@
                   <a:srgbClr val="D4AF37"/>
                 </a:solidFill>
                 <a:latin typeface="Amiri" pitchFamily="2" charset="-78"/>
+                <a:ea typeface="Amiri" pitchFamily="2" charset="-78"/>
                 <a:cs typeface="Amiri" pitchFamily="2" charset="-78"/>
               </a:rPr>
               <a:t>وَرْشَةُ التَّدْرِيبِ</a:t>
@@ -12669,6 +12758,7 @@
                   <a:srgbClr val="D4AF37"/>
                 </a:solidFill>
                 <a:latin typeface="Amiri" pitchFamily="2" charset="-78"/>
+                <a:ea typeface="Amiri" pitchFamily="2" charset="-78"/>
                 <a:cs typeface="Amiri" pitchFamily="2" charset="-78"/>
               </a:rPr>
               <a:t>م</a:t>
@@ -12989,6 +13079,7 @@
                   <a:srgbClr val="8A6D1E"/>
                 </a:solidFill>
                 <a:latin typeface="Amiri" pitchFamily="2" charset="-78"/>
+                <a:ea typeface="Amiri" pitchFamily="2" charset="-78"/>
                 <a:cs typeface="Amiri" pitchFamily="2" charset="-78"/>
               </a:rPr>
               <a:t>آدَابُ الصَّفِّ</a:t>
@@ -14520,6 +14611,7 @@
                   <a:srgbClr val="D4AF37"/>
                 </a:solidFill>
                 <a:latin typeface="Amiri" pitchFamily="2" charset="-78"/>
+                <a:ea typeface="Amiri" pitchFamily="2" charset="-78"/>
                 <a:cs typeface="Amiri" pitchFamily="2" charset="-78"/>
               </a:rPr>
               <a:t>م</a:t>
@@ -14840,6 +14932,7 @@
                   <a:srgbClr val="8A6D1E"/>
                 </a:solidFill>
                 <a:latin typeface="Amiri" pitchFamily="2" charset="-78"/>
+                <a:ea typeface="Amiri" pitchFamily="2" charset="-78"/>
                 <a:cs typeface="Amiri" pitchFamily="2" charset="-78"/>
               </a:rPr>
               <a:t>خَرِيطَةُ الوَرْشَةِ</a:t>
@@ -15154,6 +15247,7 @@
                   <a:srgbClr val="1B3B6F"/>
                 </a:solidFill>
                 <a:latin typeface="Amiri" pitchFamily="2" charset="-78"/>
+                <a:ea typeface="Amiri" pitchFamily="2" charset="-78"/>
                 <a:cs typeface="Amiri" pitchFamily="2" charset="-78"/>
               </a:rPr>
               <a:t>كَيْفَ</a:t>
@@ -15430,6 +15524,7 @@
                   <a:srgbClr val="1E6B52"/>
                 </a:solidFill>
                 <a:latin typeface="Amiri" pitchFamily="2" charset="-78"/>
+                <a:ea typeface="Amiri" pitchFamily="2" charset="-78"/>
                 <a:cs typeface="Amiri" pitchFamily="2" charset="-78"/>
               </a:rPr>
               <a:t>الاسْتِمَارَةُ</a:t>
@@ -15706,6 +15801,7 @@
                   <a:srgbClr val="1E6B52"/>
                 </a:solidFill>
                 <a:latin typeface="Amiri" pitchFamily="2" charset="-78"/>
+                <a:ea typeface="Amiri" pitchFamily="2" charset="-78"/>
                 <a:cs typeface="Amiri" pitchFamily="2" charset="-78"/>
               </a:rPr>
               <a:t>الرِّسَالَةُ</a:t>
@@ -15982,6 +16078,7 @@
                   <a:srgbClr val="1E6B52"/>
                 </a:solidFill>
                 <a:latin typeface="Amiri" pitchFamily="2" charset="-78"/>
+                <a:ea typeface="Amiri" pitchFamily="2" charset="-78"/>
                 <a:cs typeface="Amiri" pitchFamily="2" charset="-78"/>
               </a:rPr>
               <a:t>المَقَالُ</a:t>
@@ -16258,6 +16355,7 @@
                   <a:srgbClr val="8A6D1E"/>
                 </a:solidFill>
                 <a:latin typeface="Amiri" pitchFamily="2" charset="-78"/>
+                <a:ea typeface="Amiri" pitchFamily="2" charset="-78"/>
                 <a:cs typeface="Amiri" pitchFamily="2" charset="-78"/>
               </a:rPr>
               <a:t>قَيِّمْ</a:t>
@@ -16501,6 +16599,7 @@
                   <a:srgbClr val="D4AF37"/>
                 </a:solidFill>
                 <a:latin typeface="Amiri" pitchFamily="2" charset="-78"/>
+                <a:ea typeface="Amiri" pitchFamily="2" charset="-78"/>
                 <a:cs typeface="Amiri" pitchFamily="2" charset="-78"/>
               </a:rPr>
               <a:t>م</a:t>
@@ -16821,6 +16920,7 @@
                   <a:srgbClr val="8A6D1E"/>
                 </a:solidFill>
                 <a:latin typeface="Amiri" pitchFamily="2" charset="-78"/>
+                <a:ea typeface="Amiri" pitchFamily="2" charset="-78"/>
                 <a:cs typeface="Amiri" pitchFamily="2" charset="-78"/>
               </a:rPr>
               <a:t>امْتِحَانُ الكِتَابَةِ</a:t>
@@ -17445,6 +17545,7 @@
                   <a:srgbClr val="1B3B6F"/>
                 </a:solidFill>
                 <a:latin typeface="Amiri" pitchFamily="2" charset="-78"/>
+                <a:ea typeface="Amiri" pitchFamily="2" charset="-78"/>
                 <a:cs typeface="Amiri" pitchFamily="2" charset="-78"/>
               </a:rPr>
               <a:t>أَلْعَبُهَا مَعَ فَرِيقِ المَدْرَسَةِ مَرَّتَيْنِ فِي الأُسْبُوعِ</a:t>
@@ -17544,6 +17645,7 @@
                   <a:srgbClr val="1B3B6F"/>
                 </a:solidFill>
                 <a:latin typeface="Amiri" pitchFamily="2" charset="-78"/>
+                <a:ea typeface="Amiri" pitchFamily="2" charset="-78"/>
                 <a:cs typeface="Amiri" pitchFamily="2" charset="-78"/>
               </a:rPr>
               <a:t>لَا أَسْتَطِيعُ أَنْ أَسْبَحَ جَيِّدًا، لٰكِنِّي أَتَعَلَّمُ</a:t>
@@ -17643,6 +17745,7 @@
                   <a:srgbClr val="1B3B6F"/>
                 </a:solidFill>
                 <a:latin typeface="Amiri" pitchFamily="2" charset="-78"/>
+                <a:ea typeface="Amiri" pitchFamily="2" charset="-78"/>
                 <a:cs typeface="Amiri" pitchFamily="2" charset="-78"/>
               </a:rPr>
               <a:t>لِأَنَّهَا تُنْسِينِي ضَغْطَ الدِّرَاسَةِ</a:t>
@@ -17814,6 +17917,7 @@
                   <a:srgbClr val="D4AF37"/>
                 </a:solidFill>
                 <a:latin typeface="Amiri" pitchFamily="2" charset="-78"/>
+                <a:ea typeface="Amiri" pitchFamily="2" charset="-78"/>
                 <a:cs typeface="Amiri" pitchFamily="2" charset="-78"/>
               </a:rPr>
               <a:t>م</a:t>
@@ -18134,6 +18238,7 @@
                   <a:srgbClr val="8A6D1E"/>
                 </a:solidFill>
                 <a:latin typeface="Amiri" pitchFamily="2" charset="-78"/>
+                <a:ea typeface="Amiri" pitchFamily="2" charset="-78"/>
                 <a:cs typeface="Amiri" pitchFamily="2" charset="-78"/>
               </a:rPr>
               <a:t>التَّسْجِيلُ فِي نَشَاطٍ بَعْدَ المَدْرَسَةِ</a:t>
@@ -18490,6 +18595,7 @@
                   <a:srgbClr val="1B3B6F"/>
                 </a:solidFill>
                 <a:latin typeface="Amiri" pitchFamily="2" charset="-78"/>
+                <a:ea typeface="Amiri" pitchFamily="2" charset="-78"/>
                 <a:cs typeface="Amiri" pitchFamily="2" charset="-78"/>
               </a:rPr>
               <a:t>الاسْمُ وَالصَّفُّ</a:t>
@@ -18734,6 +18840,7 @@
                   <a:srgbClr val="1B3B6F"/>
                 </a:solidFill>
                 <a:latin typeface="Amiri" pitchFamily="2" charset="-78"/>
+                <a:ea typeface="Amiri" pitchFamily="2" charset="-78"/>
                 <a:cs typeface="Amiri" pitchFamily="2" charset="-78"/>
               </a:rPr>
               <a:t>النَّشَاطُ</a:t>
@@ -18978,6 +19085,7 @@
                   <a:srgbClr val="1B3B6F"/>
                 </a:solidFill>
                 <a:latin typeface="Amiri" pitchFamily="2" charset="-78"/>
+                <a:ea typeface="Amiri" pitchFamily="2" charset="-78"/>
                 <a:cs typeface="Amiri" pitchFamily="2" charset="-78"/>
               </a:rPr>
               <a:t>الأَيَّامُ المُنَاسِبَةُ</a:t>
@@ -19222,6 +19330,7 @@
                   <a:srgbClr val="1B3B6F"/>
                 </a:solidFill>
                 <a:latin typeface="Amiri" pitchFamily="2" charset="-78"/>
+                <a:ea typeface="Amiri" pitchFamily="2" charset="-78"/>
                 <a:cs typeface="Amiri" pitchFamily="2" charset="-78"/>
               </a:rPr>
               <a:t>مُسْتَوَاكَ</a:t>
@@ -19466,6 +19575,7 @@
                   <a:srgbClr val="1B3B6F"/>
                 </a:solidFill>
                 <a:latin typeface="Amiri" pitchFamily="2" charset="-78"/>
+                <a:ea typeface="Amiri" pitchFamily="2" charset="-78"/>
                 <a:cs typeface="Amiri" pitchFamily="2" charset="-78"/>
               </a:rPr>
               <a:t>هِوَايَةٌ أُخْرَى عِنْدَكَ</a:t>
@@ -19710,6 +19820,7 @@
                   <a:srgbClr val="1B3B6F"/>
                 </a:solidFill>
                 <a:latin typeface="Amiri" pitchFamily="2" charset="-78"/>
+                <a:ea typeface="Amiri" pitchFamily="2" charset="-78"/>
                 <a:cs typeface="Amiri" pitchFamily="2" charset="-78"/>
               </a:rPr>
               <a:t>كَمْ سَاعَةً فِي الأُسْبُوعِ تُمَارِسُ الرِّيَاضَةَ؟</a:t>
@@ -19954,6 +20065,7 @@
                   <a:srgbClr val="1B3B6F"/>
                 </a:solidFill>
                 <a:latin typeface="Amiri" pitchFamily="2" charset="-78"/>
+                <a:ea typeface="Amiri" pitchFamily="2" charset="-78"/>
                 <a:cs typeface="Amiri" pitchFamily="2" charset="-78"/>
               </a:rPr>
               <a:t>مَهَارَةٌ تَسْتَطِيعُ أَنْ تُعَلِّمَهَا لِلْآخَرِينَ</a:t>
@@ -20133,6 +20245,7 @@
                   <a:srgbClr val="1B3B6F"/>
                 </a:solidFill>
                 <a:latin typeface="Amiri" pitchFamily="2" charset="-78"/>
+                <a:ea typeface="Amiri" pitchFamily="2" charset="-78"/>
                 <a:cs typeface="Amiri" pitchFamily="2" charset="-78"/>
               </a:rPr>
               <a:t>جُمْلَةٌ: لِمَاذَا تُرِيدُ أَنْ تُشَارِكَ؟</a:t>
@@ -20342,6 +20455,7 @@
                   <a:srgbClr val="D4AF37"/>
                 </a:solidFill>
                 <a:latin typeface="Amiri" pitchFamily="2" charset="-78"/>
+                <a:ea typeface="Amiri" pitchFamily="2" charset="-78"/>
                 <a:cs typeface="Amiri" pitchFamily="2" charset="-78"/>
               </a:rPr>
               <a:t>م</a:t>
@@ -20662,6 +20776,7 @@
                   <a:srgbClr val="8A6D1E"/>
                 </a:solidFill>
                 <a:latin typeface="Amiri" pitchFamily="2" charset="-78"/>
+                <a:ea typeface="Amiri" pitchFamily="2" charset="-78"/>
                 <a:cs typeface="Amiri" pitchFamily="2" charset="-78"/>
               </a:rPr>
               <a:t>نَمُوذَجُ الإِجَابَةِ</a:t>
@@ -20980,6 +21095,7 @@
                   <a:srgbClr val="1B3B6F"/>
                 </a:solidFill>
                 <a:latin typeface="Amiri" pitchFamily="2" charset="-78"/>
+                <a:ea typeface="Amiri" pitchFamily="2" charset="-78"/>
                 <a:cs typeface="Amiri" pitchFamily="2" charset="-78"/>
               </a:rPr>
               <a:t>سَامِي يُوسُفُ، الصَّفُّ التَّاسِعُ</a:t>
@@ -21018,6 +21134,7 @@
                   <a:srgbClr val="1B3B6F"/>
                 </a:solidFill>
                 <a:latin typeface="Amiri" pitchFamily="2" charset="-78"/>
+                <a:ea typeface="Amiri" pitchFamily="2" charset="-78"/>
                 <a:cs typeface="Amiri" pitchFamily="2" charset="-78"/>
               </a:rPr>
               <a:t>الاسْمُ وَالصَّفُّ</a:t>
@@ -21159,6 +21276,7 @@
                   <a:srgbClr val="1B3B6F"/>
                 </a:solidFill>
                 <a:latin typeface="Amiri" pitchFamily="2" charset="-78"/>
+                <a:ea typeface="Amiri" pitchFamily="2" charset="-78"/>
                 <a:cs typeface="Amiri" pitchFamily="2" charset="-78"/>
               </a:rPr>
               <a:t>نَادِي الشِّطْرَنْجِ</a:t>
@@ -21197,6 +21315,7 @@
                   <a:srgbClr val="1B3B6F"/>
                 </a:solidFill>
                 <a:latin typeface="Amiri" pitchFamily="2" charset="-78"/>
+                <a:ea typeface="Amiri" pitchFamily="2" charset="-78"/>
                 <a:cs typeface="Amiri" pitchFamily="2" charset="-78"/>
               </a:rPr>
               <a:t>النَّشَاطُ</a:t>
@@ -21338,6 +21457,7 @@
                   <a:srgbClr val="1B3B6F"/>
                 </a:solidFill>
                 <a:latin typeface="Amiri" pitchFamily="2" charset="-78"/>
+                <a:ea typeface="Amiri" pitchFamily="2" charset="-78"/>
                 <a:cs typeface="Amiri" pitchFamily="2" charset="-78"/>
               </a:rPr>
               <a:t>الإِثْنَيْنُ وَالخَمِيسُ</a:t>
@@ -21376,6 +21496,7 @@
                   <a:srgbClr val="1B3B6F"/>
                 </a:solidFill>
                 <a:latin typeface="Amiri" pitchFamily="2" charset="-78"/>
+                <a:ea typeface="Amiri" pitchFamily="2" charset="-78"/>
                 <a:cs typeface="Amiri" pitchFamily="2" charset="-78"/>
               </a:rPr>
               <a:t>الأَيَّامُ المُنَاسِبَةُ</a:t>
@@ -21517,6 +21638,7 @@
                   <a:srgbClr val="1B3B6F"/>
                 </a:solidFill>
                 <a:latin typeface="Amiri" pitchFamily="2" charset="-78"/>
+                <a:ea typeface="Amiri" pitchFamily="2" charset="-78"/>
                 <a:cs typeface="Amiri" pitchFamily="2" charset="-78"/>
               </a:rPr>
               <a:t>مُبْتَدِئٌ</a:t>
@@ -21555,6 +21677,7 @@
                   <a:srgbClr val="1B3B6F"/>
                 </a:solidFill>
                 <a:latin typeface="Amiri" pitchFamily="2" charset="-78"/>
+                <a:ea typeface="Amiri" pitchFamily="2" charset="-78"/>
                 <a:cs typeface="Amiri" pitchFamily="2" charset="-78"/>
               </a:rPr>
               <a:t>مُسْتَوَاكَ</a:t>
@@ -21696,6 +21819,7 @@
                   <a:srgbClr val="1B3B6F"/>
                 </a:solidFill>
                 <a:latin typeface="Amiri" pitchFamily="2" charset="-78"/>
+                <a:ea typeface="Amiri" pitchFamily="2" charset="-78"/>
                 <a:cs typeface="Amiri" pitchFamily="2" charset="-78"/>
               </a:rPr>
               <a:t>القِرَاءَةُ</a:t>
@@ -21734,6 +21858,7 @@
                   <a:srgbClr val="1B3B6F"/>
                 </a:solidFill>
                 <a:latin typeface="Amiri" pitchFamily="2" charset="-78"/>
+                <a:ea typeface="Amiri" pitchFamily="2" charset="-78"/>
                 <a:cs typeface="Amiri" pitchFamily="2" charset="-78"/>
               </a:rPr>
               <a:t>هِوَايَةٌ أُخْرَى عِنْدَكَ</a:t>
@@ -21875,6 +22000,7 @@
                   <a:srgbClr val="1B3B6F"/>
                 </a:solidFill>
                 <a:latin typeface="Amiri" pitchFamily="2" charset="-78"/>
+                <a:ea typeface="Amiri" pitchFamily="2" charset="-78"/>
                 <a:cs typeface="Amiri" pitchFamily="2" charset="-78"/>
               </a:rPr>
               <a:t>ثَلَاثُ سَاعَاتٍ</a:t>
@@ -21913,6 +22039,7 @@
                   <a:srgbClr val="1B3B6F"/>
                 </a:solidFill>
                 <a:latin typeface="Amiri" pitchFamily="2" charset="-78"/>
+                <a:ea typeface="Amiri" pitchFamily="2" charset="-78"/>
                 <a:cs typeface="Amiri" pitchFamily="2" charset="-78"/>
               </a:rPr>
               <a:t>كَمْ سَاعَةً فِي الأُسْبُوعِ تُمَارِسُ الرِّيَاضَةَ؟</a:t>
@@ -22054,6 +22181,7 @@
                   <a:srgbClr val="1B3B6F"/>
                 </a:solidFill>
                 <a:latin typeface="Amiri" pitchFamily="2" charset="-78"/>
+                <a:ea typeface="Amiri" pitchFamily="2" charset="-78"/>
                 <a:cs typeface="Amiri" pitchFamily="2" charset="-78"/>
               </a:rPr>
               <a:t>الرَّسْمُ بِالأَلْوَانِ المَائِيَّةِ</a:t>
@@ -22092,6 +22220,7 @@
                   <a:srgbClr val="1B3B6F"/>
                 </a:solidFill>
                 <a:latin typeface="Amiri" pitchFamily="2" charset="-78"/>
+                <a:ea typeface="Amiri" pitchFamily="2" charset="-78"/>
                 <a:cs typeface="Amiri" pitchFamily="2" charset="-78"/>
               </a:rPr>
               <a:t>مَهَارَةٌ تَسْتَطِيعُ أَنْ تُعَلِّمَهَا لِلْآخَرِينَ</a:t>
@@ -22233,6 +22362,7 @@
                   <a:srgbClr val="1B3B6F"/>
                 </a:solidFill>
                 <a:latin typeface="Amiri" pitchFamily="2" charset="-78"/>
+                <a:ea typeface="Amiri" pitchFamily="2" charset="-78"/>
                 <a:cs typeface="Amiri" pitchFamily="2" charset="-78"/>
               </a:rPr>
               <a:t>أُرِيدُ أَنْ أُشَارِكَ لِأَنَّ الشِّطْرَنْجَ يُعَلِّمُنِي التَّفْكِيرَ وَالصَّبْرَ.</a:t>
@@ -22271,6 +22401,7 @@
                   <a:srgbClr val="1B3B6F"/>
                 </a:solidFill>
                 <a:latin typeface="Amiri" pitchFamily="2" charset="-78"/>
+                <a:ea typeface="Amiri" pitchFamily="2" charset="-78"/>
                 <a:cs typeface="Amiri" pitchFamily="2" charset="-78"/>
               </a:rPr>
               <a:t>جُمْلَةٌ: لِمَاذَا تُرِيدُ أَنْ تُشَارِكَ؟</a:t>
@@ -22480,6 +22611,7 @@
                   <a:srgbClr val="D4AF37"/>
                 </a:solidFill>
                 <a:latin typeface="Amiri" pitchFamily="2" charset="-78"/>
+                <a:ea typeface="Amiri" pitchFamily="2" charset="-78"/>
                 <a:cs typeface="Amiri" pitchFamily="2" charset="-78"/>
               </a:rPr>
               <a:t>م</a:t>
@@ -22800,6 +22932,7 @@
                   <a:srgbClr val="8A6D1E"/>
                 </a:solidFill>
                 <a:latin typeface="Amiri" pitchFamily="2" charset="-78"/>
+                <a:ea typeface="Amiri" pitchFamily="2" charset="-78"/>
                 <a:cs typeface="Amiri" pitchFamily="2" charset="-78"/>
               </a:rPr>
               <a:t>رِسَالَةٌ عَنْ هِوَايَاتِي</a:t>
@@ -23275,6 +23408,7 @@
                   <a:srgbClr val="1B3B6F"/>
                 </a:solidFill>
                 <a:latin typeface="Amiri" pitchFamily="2" charset="-78"/>
+                <a:ea typeface="Amiri" pitchFamily="2" charset="-78"/>
                 <a:cs typeface="Amiri" pitchFamily="2" charset="-78"/>
               </a:rPr>
               <a:t>أَلْعَبُ … مَرَّتَيْنِ فِي الأُسْبُوعِ</a:t>
@@ -23351,6 +23485,7 @@
                   <a:srgbClr val="1B3B6F"/>
                 </a:solidFill>
                 <a:latin typeface="Amiri" pitchFamily="2" charset="-78"/>
+                <a:ea typeface="Amiri" pitchFamily="2" charset="-78"/>
                 <a:cs typeface="Amiri" pitchFamily="2" charset="-78"/>
               </a:rPr>
               <a:t>لَا أَسْتَطِيعُ أَنْ … لٰكِنِّي …</a:t>
@@ -23427,6 +23562,7 @@
                   <a:srgbClr val="1B3B6F"/>
                 </a:solidFill>
                 <a:latin typeface="Amiri" pitchFamily="2" charset="-78"/>
+                <a:ea typeface="Amiri" pitchFamily="2" charset="-78"/>
                 <a:cs typeface="Amiri" pitchFamily="2" charset="-78"/>
               </a:rPr>
               <a:t>أَمْسِ لَعِبْنَا / فَازَ فَرِيقُنَا</a:t>
@@ -23503,6 +23639,7 @@
                   <a:srgbClr val="1B3B6F"/>
                 </a:solidFill>
                 <a:latin typeface="Amiri" pitchFamily="2" charset="-78"/>
+                <a:ea typeface="Amiri" pitchFamily="2" charset="-78"/>
                 <a:cs typeface="Amiri" pitchFamily="2" charset="-78"/>
               </a:rPr>
               <a:t>سَأُجَرِّبُ هِوَايَةً جَدِيدَةً</a:t>
@@ -23674,6 +23811,7 @@
                   <a:srgbClr val="D4AF37"/>
                 </a:solidFill>
                 <a:latin typeface="Amiri" pitchFamily="2" charset="-78"/>
+                <a:ea typeface="Amiri" pitchFamily="2" charset="-78"/>
                 <a:cs typeface="Amiri" pitchFamily="2" charset="-78"/>
               </a:rPr>
               <a:t>م</a:t>
@@ -23994,6 +24132,7 @@
                   <a:srgbClr val="8A6D1E"/>
                 </a:solidFill>
                 <a:latin typeface="Amiri" pitchFamily="2" charset="-78"/>
+                <a:ea typeface="Amiri" pitchFamily="2" charset="-78"/>
                 <a:cs typeface="Amiri" pitchFamily="2" charset="-78"/>
               </a:rPr>
               <a:t>نَصُّ السُّؤَالِ</a:t>
@@ -24274,6 +24413,7 @@
                   <a:srgbClr val="1B3B6F"/>
                 </a:solidFill>
                 <a:latin typeface="Amiri" pitchFamily="2" charset="-78"/>
+                <a:ea typeface="Amiri" pitchFamily="2" charset="-78"/>
                 <a:cs typeface="Amiri" pitchFamily="2" charset="-78"/>
               </a:rPr>
               <a:t>سَأَلَكَ صَدِيقُكَ عَنْ وَقْتِ فَرَاغِكَ. اكْتُبْ لَهُ رِسَالَةً (٨٠–٩٠ كَلِمَةً).</a:t>
@@ -24415,6 +24555,7 @@
                   <a:srgbClr val="1B3B6F"/>
                 </a:solidFill>
                 <a:latin typeface="Amiri" pitchFamily="2" charset="-78"/>
+                <a:ea typeface="Amiri" pitchFamily="2" charset="-78"/>
                 <a:cs typeface="Amiri" pitchFamily="2" charset="-78"/>
               </a:rPr>
               <a:t>مَا هِوَايَاتُكَ؟ وَكَمْ مَرَّةً تُمَارِسُهَا؟</a:t>
@@ -24556,6 +24697,7 @@
                   <a:srgbClr val="1B3B6F"/>
                 </a:solidFill>
                 <a:latin typeface="Amiri" pitchFamily="2" charset="-78"/>
+                <a:ea typeface="Amiri" pitchFamily="2" charset="-78"/>
                 <a:cs typeface="Amiri" pitchFamily="2" charset="-78"/>
               </a:rPr>
               <a:t>مَاذَا تَسْتَطِيعُ / لَا تَسْتَطِيعُ أَنْ تَفْعَلَ جَيِّدًا؟</a:t>
@@ -24697,6 +24839,7 @@
                   <a:srgbClr val="1B3B6F"/>
                 </a:solidFill>
                 <a:latin typeface="Amiri" pitchFamily="2" charset="-78"/>
+                <a:ea typeface="Amiri" pitchFamily="2" charset="-78"/>
                 <a:cs typeface="Amiri" pitchFamily="2" charset="-78"/>
               </a:rPr>
               <a:t>مَاذَا فَعَلْتَ فِي وَقْتِ فَرَاغِكَ أَمْسِ؟</a:t>
@@ -24838,6 +24981,7 @@
                   <a:srgbClr val="1B3B6F"/>
                 </a:solidFill>
                 <a:latin typeface="Amiri" pitchFamily="2" charset="-78"/>
+                <a:ea typeface="Amiri" pitchFamily="2" charset="-78"/>
                 <a:cs typeface="Amiri" pitchFamily="2" charset="-78"/>
               </a:rPr>
               <a:t>مَا الهِوَايَةُ الجَدِيدَةُ الَّتِي سَتُجَرِّبُهَا؟ اسْأَلْ صَدِيقَكَ سُؤَالًا.</a:t>
@@ -25047,6 +25191,7 @@
                   <a:srgbClr val="D4AF37"/>
                 </a:solidFill>
                 <a:latin typeface="Amiri" pitchFamily="2" charset="-78"/>
+                <a:ea typeface="Amiri" pitchFamily="2" charset="-78"/>
                 <a:cs typeface="Amiri" pitchFamily="2" charset="-78"/>
               </a:rPr>
               <a:t>م</a:t>
@@ -25367,6 +25512,7 @@
                   <a:srgbClr val="8A6D1E"/>
                 </a:solidFill>
                 <a:latin typeface="Amiri" pitchFamily="2" charset="-78"/>
+                <a:ea typeface="Amiri" pitchFamily="2" charset="-78"/>
                 <a:cs typeface="Amiri" pitchFamily="2" charset="-78"/>
               </a:rPr>
               <a:t>قَوَالِبُ الكِتَابَةِ</a:t>
@@ -25647,6 +25793,7 @@
                   <a:srgbClr val="1B3B6F"/>
                 </a:solidFill>
                 <a:latin typeface="Amiri" pitchFamily="2" charset="-78"/>
+                <a:ea typeface="Amiri" pitchFamily="2" charset="-78"/>
                 <a:cs typeface="Amiri" pitchFamily="2" charset="-78"/>
               </a:rPr>
               <a:t>مَرْحَبًا يَا ______ ، كَيْفَ حَالُكَ؟</a:t>
@@ -25853,6 +26000,7 @@
                   <a:srgbClr val="1B3B6F"/>
                 </a:solidFill>
                 <a:latin typeface="Amiri" pitchFamily="2" charset="-78"/>
+                <a:ea typeface="Amiri" pitchFamily="2" charset="-78"/>
                 <a:cs typeface="Amiri" pitchFamily="2" charset="-78"/>
               </a:rPr>
               <a:t>أُحِبُّ ______ ، وَأُمَارِسُهَا ______ .</a:t>
@@ -26059,6 +26207,7 @@
                   <a:srgbClr val="1B3B6F"/>
                 </a:solidFill>
                 <a:latin typeface="Amiri" pitchFamily="2" charset="-78"/>
+                <a:ea typeface="Amiri" pitchFamily="2" charset="-78"/>
                 <a:cs typeface="Amiri" pitchFamily="2" charset="-78"/>
               </a:rPr>
               <a:t>أَسْتَطِيعُ أَنْ ______ ، لٰكِنِّي لَا أَسْتَطِيعُ أَنْ ______ .</a:t>
@@ -26265,6 +26414,7 @@
                   <a:srgbClr val="1B3B6F"/>
                 </a:solidFill>
                 <a:latin typeface="Amiri" pitchFamily="2" charset="-78"/>
+                <a:ea typeface="Amiri" pitchFamily="2" charset="-78"/>
                 <a:cs typeface="Amiri" pitchFamily="2" charset="-78"/>
               </a:rPr>
               <a:t>أَمْسِ ______ مَعَ ______ .</a:t>
@@ -26471,6 +26621,7 @@
                   <a:srgbClr val="1B3B6F"/>
                 </a:solidFill>
                 <a:latin typeface="Amiri" pitchFamily="2" charset="-78"/>
+                <a:ea typeface="Amiri" pitchFamily="2" charset="-78"/>
                 <a:cs typeface="Amiri" pitchFamily="2" charset="-78"/>
               </a:rPr>
               <a:t>فِي الصَّيْفِ سَأُجَرِّبُ ______ . وَأَنْتَ، ______ ؟</a:t>
@@ -26677,6 +26828,7 @@
                   <a:srgbClr val="1B3B6F"/>
                 </a:solidFill>
                 <a:latin typeface="Amiri" pitchFamily="2" charset="-78"/>
+                <a:ea typeface="Amiri" pitchFamily="2" charset="-78"/>
                 <a:cs typeface="Amiri" pitchFamily="2" charset="-78"/>
               </a:rPr>
               <a:t>مَعَ السَّلَامَةِ، ______</a:t>
@@ -26916,13 +27068,9 @@
     <a:fontScheme name="Office">
       <a:majorFont>
         <a:latin typeface="Calibri Light" panose="020F0302020204030204"/>
-        <a:ea typeface=""/>
-        <a:cs typeface=""/>
-        <a:font script="Jpan" typeface="游ゴシック Light"/>
-        <a:font script="Hang" typeface="맑은 고딕"/>
-        <a:font script="Hans" typeface="等线 Light"/>
-        <a:font script="Hant" typeface="新細明體"/>
-        <a:font script="Arab" typeface="Times New Roman"/>
+        <a:ea typeface="Amiri" pitchFamily="2" charset="-78"/>
+        <a:cs typeface="Amiri" pitchFamily="2" charset="-78"/>
+        <a:font script="Arab" typeface="Amiri"/>
         <a:font script="Hebr" typeface="Times New Roman"/>
         <a:font script="Thai" typeface="Angsana New"/>
         <a:font script="Ethi" typeface="Nyala"/>
@@ -26968,13 +27116,9 @@
       </a:majorFont>
       <a:minorFont>
         <a:latin typeface="Calibri" panose="020F0502020204030204"/>
-        <a:ea typeface=""/>
-        <a:cs typeface=""/>
-        <a:font script="Jpan" typeface="游ゴシック"/>
-        <a:font script="Hang" typeface="맑은 고딕"/>
-        <a:font script="Hans" typeface="等线"/>
-        <a:font script="Hant" typeface="新細明體"/>
-        <a:font script="Arab" typeface="Arial"/>
+        <a:ea typeface="Amiri" pitchFamily="2" charset="-78"/>
+        <a:cs typeface="Amiri" pitchFamily="2" charset="-78"/>
+        <a:font script="Arab" typeface="Amiri"/>
         <a:font script="Hebr" typeface="Arial"/>
         <a:font script="Thai" typeface="Cordia New"/>
         <a:font script="Ethi" typeface="Nyala"/>

--- a/Topic_B/Exam_Practice/TB-L08_Writing_Workshop_Hobbies_Sport_and_Free_Time.pptx
+++ b/Topic_B/Exam_Practice/TB-L08_Writing_Workshop_Hobbies_Sport_and_Free_Time.pptx
@@ -3848,7 +3848,7 @@
                 <a:solidFill>
                   <a:srgbClr val="FFFFFF"/>
                 </a:solidFill>
-                <a:latin typeface="Calibri" pitchFamily="34" charset="0"/>
+                <a:latin typeface="Amiri" pitchFamily="2" charset="-78"/>
                 <a:ea typeface="Amiri" pitchFamily="2" charset="-78"/>
                 <a:cs typeface="Amiri" pitchFamily="2" charset="-78"/>
               </a:rPr>
@@ -3914,7 +3914,7 @@
                 <a:solidFill>
                   <a:srgbClr val="FFFFFF"/>
                 </a:solidFill>
-                <a:latin typeface="Calibri" pitchFamily="34" charset="0"/>
+                <a:latin typeface="Amiri" pitchFamily="2" charset="-78"/>
                 <a:ea typeface="Amiri" pitchFamily="2" charset="-78"/>
                 <a:cs typeface="Amiri" pitchFamily="2" charset="-78"/>
               </a:rPr>
@@ -3980,7 +3980,7 @@
                 <a:solidFill>
                   <a:srgbClr val="FFFFFF"/>
                 </a:solidFill>
-                <a:latin typeface="Calibri" pitchFamily="34" charset="0"/>
+                <a:latin typeface="Amiri" pitchFamily="2" charset="-78"/>
                 <a:ea typeface="Amiri" pitchFamily="2" charset="-78"/>
                 <a:cs typeface="Amiri" pitchFamily="2" charset="-78"/>
               </a:rPr>
@@ -4046,7 +4046,7 @@
                 <a:solidFill>
                   <a:srgbClr val="FFFFFF"/>
                 </a:solidFill>
-                <a:latin typeface="Calibri" pitchFamily="34" charset="0"/>
+                <a:latin typeface="Amiri" pitchFamily="2" charset="-78"/>
                 <a:ea typeface="Amiri" pitchFamily="2" charset="-78"/>
                 <a:cs typeface="Amiri" pitchFamily="2" charset="-78"/>
               </a:rPr>
@@ -4844,7 +4844,7 @@
                 <a:solidFill>
                   <a:srgbClr val="FFFFFF"/>
                 </a:solidFill>
-                <a:latin typeface="Calibri" pitchFamily="34" charset="0"/>
+                <a:latin typeface="Amiri" pitchFamily="2" charset="-78"/>
                 <a:ea typeface="Amiri" pitchFamily="2" charset="-78"/>
                 <a:cs typeface="Amiri" pitchFamily="2" charset="-78"/>
               </a:rPr>
@@ -4910,7 +4910,7 @@
                 <a:solidFill>
                   <a:srgbClr val="FFFFFF"/>
                 </a:solidFill>
-                <a:latin typeface="Calibri" pitchFamily="34" charset="0"/>
+                <a:latin typeface="Amiri" pitchFamily="2" charset="-78"/>
                 <a:ea typeface="Amiri" pitchFamily="2" charset="-78"/>
                 <a:cs typeface="Amiri" pitchFamily="2" charset="-78"/>
               </a:rPr>
@@ -4976,7 +4976,7 @@
                 <a:solidFill>
                   <a:srgbClr val="FFFFFF"/>
                 </a:solidFill>
-                <a:latin typeface="Calibri" pitchFamily="34" charset="0"/>
+                <a:latin typeface="Amiri" pitchFamily="2" charset="-78"/>
                 <a:ea typeface="Amiri" pitchFamily="2" charset="-78"/>
                 <a:cs typeface="Amiri" pitchFamily="2" charset="-78"/>
               </a:rPr>
@@ -5042,7 +5042,7 @@
                 <a:solidFill>
                   <a:srgbClr val="FFFFFF"/>
                 </a:solidFill>
-                <a:latin typeface="Calibri" pitchFamily="34" charset="0"/>
+                <a:latin typeface="Amiri" pitchFamily="2" charset="-78"/>
                 <a:ea typeface="Amiri" pitchFamily="2" charset="-78"/>
                 <a:cs typeface="Amiri" pitchFamily="2" charset="-78"/>
               </a:rPr>
@@ -8602,7 +8602,7 @@
                 <a:solidFill>
                   <a:srgbClr val="FFFFFF"/>
                 </a:solidFill>
-                <a:latin typeface="Calibri" pitchFamily="34" charset="0"/>
+                <a:latin typeface="Amiri" pitchFamily="2" charset="-78"/>
                 <a:ea typeface="Amiri" pitchFamily="2" charset="-78"/>
                 <a:cs typeface="Amiri" pitchFamily="2" charset="-78"/>
               </a:rPr>
@@ -8668,7 +8668,7 @@
                 <a:solidFill>
                   <a:srgbClr val="FFFFFF"/>
                 </a:solidFill>
-                <a:latin typeface="Calibri" pitchFamily="34" charset="0"/>
+                <a:latin typeface="Amiri" pitchFamily="2" charset="-78"/>
                 <a:ea typeface="Amiri" pitchFamily="2" charset="-78"/>
                 <a:cs typeface="Amiri" pitchFamily="2" charset="-78"/>
               </a:rPr>
@@ -8734,7 +8734,7 @@
                 <a:solidFill>
                   <a:srgbClr val="FFFFFF"/>
                 </a:solidFill>
-                <a:latin typeface="Calibri" pitchFamily="34" charset="0"/>
+                <a:latin typeface="Amiri" pitchFamily="2" charset="-78"/>
                 <a:ea typeface="Amiri" pitchFamily="2" charset="-78"/>
                 <a:cs typeface="Amiri" pitchFamily="2" charset="-78"/>
               </a:rPr>
@@ -8800,7 +8800,7 @@
                 <a:solidFill>
                   <a:srgbClr val="FFFFFF"/>
                 </a:solidFill>
-                <a:latin typeface="Calibri" pitchFamily="34" charset="0"/>
+                <a:latin typeface="Amiri" pitchFamily="2" charset="-78"/>
                 <a:ea typeface="Amiri" pitchFamily="2" charset="-78"/>
                 <a:cs typeface="Amiri" pitchFamily="2" charset="-78"/>
               </a:rPr>
@@ -9587,7 +9587,7 @@
                 <a:solidFill>
                   <a:srgbClr val="FFFFFF"/>
                 </a:solidFill>
-                <a:latin typeface="Calibri" pitchFamily="34" charset="0"/>
+                <a:latin typeface="Amiri" pitchFamily="2" charset="-78"/>
                 <a:ea typeface="Amiri" pitchFamily="2" charset="-78"/>
                 <a:cs typeface="Amiri" pitchFamily="2" charset="-78"/>
               </a:rPr>
@@ -9653,7 +9653,7 @@
                 <a:solidFill>
                   <a:srgbClr val="FFFFFF"/>
                 </a:solidFill>
-                <a:latin typeface="Calibri" pitchFamily="34" charset="0"/>
+                <a:latin typeface="Amiri" pitchFamily="2" charset="-78"/>
                 <a:ea typeface="Amiri" pitchFamily="2" charset="-78"/>
                 <a:cs typeface="Amiri" pitchFamily="2" charset="-78"/>
               </a:rPr>
@@ -9719,7 +9719,7 @@
                 <a:solidFill>
                   <a:srgbClr val="FFFFFF"/>
                 </a:solidFill>
-                <a:latin typeface="Calibri" pitchFamily="34" charset="0"/>
+                <a:latin typeface="Amiri" pitchFamily="2" charset="-78"/>
                 <a:ea typeface="Amiri" pitchFamily="2" charset="-78"/>
                 <a:cs typeface="Amiri" pitchFamily="2" charset="-78"/>
               </a:rPr>
@@ -9785,7 +9785,7 @@
                 <a:solidFill>
                   <a:srgbClr val="FFFFFF"/>
                 </a:solidFill>
-                <a:latin typeface="Calibri" pitchFamily="34" charset="0"/>
+                <a:latin typeface="Amiri" pitchFamily="2" charset="-78"/>
                 <a:ea typeface="Amiri" pitchFamily="2" charset="-78"/>
                 <a:cs typeface="Amiri" pitchFamily="2" charset="-78"/>
               </a:rPr>
@@ -10572,7 +10572,7 @@
                 <a:solidFill>
                   <a:srgbClr val="FFFFFF"/>
                 </a:solidFill>
-                <a:latin typeface="Calibri" pitchFamily="34" charset="0"/>
+                <a:latin typeface="Amiri" pitchFamily="2" charset="-78"/>
                 <a:ea typeface="Amiri" pitchFamily="2" charset="-78"/>
                 <a:cs typeface="Amiri" pitchFamily="2" charset="-78"/>
               </a:rPr>
@@ -10638,7 +10638,7 @@
                 <a:solidFill>
                   <a:srgbClr val="FFFFFF"/>
                 </a:solidFill>
-                <a:latin typeface="Calibri" pitchFamily="34" charset="0"/>
+                <a:latin typeface="Amiri" pitchFamily="2" charset="-78"/>
                 <a:ea typeface="Amiri" pitchFamily="2" charset="-78"/>
                 <a:cs typeface="Amiri" pitchFamily="2" charset="-78"/>
               </a:rPr>
@@ -10704,7 +10704,7 @@
                 <a:solidFill>
                   <a:srgbClr val="FFFFFF"/>
                 </a:solidFill>
-                <a:latin typeface="Calibri" pitchFamily="34" charset="0"/>
+                <a:latin typeface="Amiri" pitchFamily="2" charset="-78"/>
                 <a:ea typeface="Amiri" pitchFamily="2" charset="-78"/>
                 <a:cs typeface="Amiri" pitchFamily="2" charset="-78"/>
               </a:rPr>
@@ -10770,7 +10770,7 @@
                 <a:solidFill>
                   <a:srgbClr val="FFFFFF"/>
                 </a:solidFill>
-                <a:latin typeface="Calibri" pitchFamily="34" charset="0"/>
+                <a:latin typeface="Amiri" pitchFamily="2" charset="-78"/>
                 <a:ea typeface="Amiri" pitchFamily="2" charset="-78"/>
                 <a:cs typeface="Amiri" pitchFamily="2" charset="-78"/>
               </a:rPr>
